--- a/materials/pdf/original/DS15_Folien_Sprachdesign-Studio.pptx
+++ b/materials/pdf/original/DS15_Folien_Sprachdesign-Studio.pptx
@@ -123,19 +123,19 @@
   <p:extLst>
     <p:ext uri="{521415D9-36F7-43E2-AB2F-B90AF26B5E84}">
       <p14:sectionLst xmlns:p14="http://schemas.microsoft.com/office/powerpoint/2010/main">
-        <p14:section name="Start" id="{6da1386d-a38c-9287-e04d-43ecce4988e6}">
+        <p14:section name="Start" id="{24665856-0e51-58e8-35c3-c21ae04ebeba}">
           <p14:sldIdLst>
             <p14:sldId id="256"/>
           </p14:sldIdLst>
         </p14:section>
-        <p14:section name="Einstieg" id="{dbe8fdb4-1b77-e206-d0f0-703523b62079}">
+        <p14:section name="Einstieg" id="{b9c25b97-5766-0684-9a4a-4affb67640a5}">
           <p14:sldIdLst>
             <p14:sldId id="257"/>
             <p14:sldId id="258"/>
             <p14:sldId id="259"/>
           </p14:sldIdLst>
         </p14:section>
-        <p14:section name="Projekt" id="{999d597e-9aa5-d76a-7d92-3e166b8dc3b6}">
+        <p14:section name="Projekt" id="{fe8e5605-ee08-66be-2f6b-addcf9be4dec}">
           <p14:sldIdLst>
             <p14:sldId id="260"/>
             <p14:sldId id="261"/>
@@ -148,18 +148,18 @@
             <p14:sldId id="268"/>
           </p14:sldIdLst>
         </p14:section>
-        <p14:section name="Übung" id="{249f7b63-34bc-f55d-3d6e-eca4ef0be1b0}">
+        <p14:section name="Übung" id="{2ac189c7-82aa-de25-8ad1-27ca1e64c48c}">
           <p14:sldIdLst>
             <p14:sldId id="269"/>
             <p14:sldId id="270"/>
           </p14:sldIdLst>
         </p14:section>
-        <p14:section name="Sicherung" id="{2ab3fcc9-b544-af25-25e8-d3d3e7951d44}">
+        <p14:section name="Sicherung" id="{2d5e918b-a70e-0f26-7bb2-abdf5fca9fb7}">
           <p14:sldIdLst>
             <p14:sldId id="271"/>
           </p14:sldIdLst>
         </p14:section>
-        <p14:section name="Abschluss" id="{0ea2607a-49f7-501b-ce5d-c56ba7f37b08}">
+        <p14:section name="Abschluss" id="{d622b958-36b3-0524-fc15-73a1bf3c4b6d}">
           <p14:sldIdLst>
             <p14:sldId id="272"/>
           </p14:sldIdLst>
@@ -2303,6 +2303,45 @@
       </p:sp>
       <p:sp>
         <p:nvSpPr>
+          <p:cNvPr id="4" name="Text 1"/>
+          <p:cNvSpPr/>
+          <p:nvPr/>
+        </p:nvSpPr>
+        <p:spPr>
+          <a:xfrm>
+            <a:off x="7985455" y="6473952"/>
+            <a:ext cx="2926080" cy="274320"/>
+          </a:xfrm>
+          <a:prstGeom prst="rect">
+            <a:avLst/>
+          </a:prstGeom>
+          <a:noFill/>
+          <a:ln/>
+        </p:spPr>
+        <p:txBody>
+          <a:bodyPr wrap="square" lIns="0" tIns="0" rIns="0" bIns="0" rtlCol="0" anchor="ctr"/>
+          <a:lstStyle/>
+          <a:p>
+            <a:pPr algn="r" indent="0" marL="0">
+              <a:buNone/>
+            </a:pPr>
+            <a:r>
+              <a:rPr lang="en-US" sz="1100" dirty="0">
+                <a:solidFill>
+                  <a:srgbClr val="5B6770"/>
+                </a:solidFill>
+                <a:latin typeface="Calibri" pitchFamily="34" charset="0"/>
+                <a:ea typeface="Calibri" pitchFamily="34" charset="-122"/>
+                <a:cs typeface="Calibri" pitchFamily="34" charset="-120"/>
+              </a:rPr>
+              <a:t>CC BY-SA 4.0 · Frank Juchim</a:t>
+            </a:r>
+            <a:endParaRPr lang="en-US" sz="1100" dirty="0"/>
+          </a:p>
+        </p:txBody>
+      </p:sp>
+      <p:sp>
+        <p:nvSpPr>
           <p:cNvPr id="25" name="Slide Number Placeholder 0"/>
           <p:cNvSpPr>
             <a:spLocks noGrp="1"/>
@@ -2454,6 +2493,45 @@
                 <a:cs typeface="Calibri" pitchFamily="34" charset="-120"/>
               </a:rPr>
               <a:t>Level 15 · Welt D · Sprachdesign &amp; Ausblick · nur eA (Leistungskurs)</a:t>
+            </a:r>
+            <a:endParaRPr lang="en-US" sz="1100" dirty="0"/>
+          </a:p>
+        </p:txBody>
+      </p:sp>
+      <p:sp>
+        <p:nvSpPr>
+          <p:cNvPr id="4" name="Text 1"/>
+          <p:cNvSpPr/>
+          <p:nvPr/>
+        </p:nvSpPr>
+        <p:spPr>
+          <a:xfrm>
+            <a:off x="7985455" y="6473952"/>
+            <a:ext cx="2926080" cy="274320"/>
+          </a:xfrm>
+          <a:prstGeom prst="rect">
+            <a:avLst/>
+          </a:prstGeom>
+          <a:noFill/>
+          <a:ln/>
+        </p:spPr>
+        <p:txBody>
+          <a:bodyPr wrap="square" lIns="0" tIns="0" rIns="0" bIns="0" rtlCol="0" anchor="ctr"/>
+          <a:lstStyle/>
+          <a:p>
+            <a:pPr algn="r" indent="0" marL="0">
+              <a:buNone/>
+            </a:pPr>
+            <a:r>
+              <a:rPr lang="en-US" sz="1100" dirty="0">
+                <a:solidFill>
+                  <a:srgbClr val="5B6770"/>
+                </a:solidFill>
+                <a:latin typeface="Calibri" pitchFamily="34" charset="0"/>
+                <a:ea typeface="Calibri" pitchFamily="34" charset="-122"/>
+                <a:cs typeface="Calibri" pitchFamily="34" charset="-120"/>
+              </a:rPr>
+              <a:t>CC BY-SA 4.0 · Frank Juchim</a:t>
             </a:r>
             <a:endParaRPr lang="en-US" sz="1100" dirty="0"/>
           </a:p>
